--- a/Fase3/03_results/EvaluacionEntrenamiento.pptx
+++ b/Fase3/03_results/EvaluacionEntrenamiento.pptx
@@ -116,6 +116,11 @@
       </a:defRPr>
     </a:lvl9pPr>
   </p:defaultTextStyle>
+  <p:extLst>
+    <p:ext uri="{EFAFB233-063F-42B5-8137-9DF3F51BA10A}">
+      <p15:sldGuideLst xmlns:p15="http://schemas.microsoft.com/office/powerpoint/2012/main"/>
+    </p:ext>
+  </p:extLst>
 </p:presentation>
 </file>
 
@@ -201,7 +206,7 @@
           <a:p>
             <a:fld id="{AEA42829-2D2D-8F48-BFFF-E537BBA49222}" type="datetimeFigureOut">
               <a:rPr lang="es-ES_tradnl" smtClean="0"/>
-              <a:t>29/3/26</a:t>
+              <a:t>11/4/26</a:t>
             </a:fld>
             <a:endParaRPr lang="es-ES_tradnl"/>
           </a:p>
@@ -858,7 +863,7 @@
           <a:p>
             <a:fld id="{68557AC5-C7C9-C647-81A0-1565E6FA9BD3}" type="datetimeFigureOut">
               <a:rPr lang="es-ES_tradnl" smtClean="0"/>
-              <a:t>29/3/26</a:t>
+              <a:t>11/4/26</a:t>
             </a:fld>
             <a:endParaRPr lang="es-ES_tradnl"/>
           </a:p>
@@ -1058,7 +1063,7 @@
           <a:p>
             <a:fld id="{68557AC5-C7C9-C647-81A0-1565E6FA9BD3}" type="datetimeFigureOut">
               <a:rPr lang="es-ES_tradnl" smtClean="0"/>
-              <a:t>29/3/26</a:t>
+              <a:t>11/4/26</a:t>
             </a:fld>
             <a:endParaRPr lang="es-ES_tradnl"/>
           </a:p>
@@ -1268,7 +1273,7 @@
           <a:p>
             <a:fld id="{68557AC5-C7C9-C647-81A0-1565E6FA9BD3}" type="datetimeFigureOut">
               <a:rPr lang="es-ES_tradnl" smtClean="0"/>
-              <a:t>29/3/26</a:t>
+              <a:t>11/4/26</a:t>
             </a:fld>
             <a:endParaRPr lang="es-ES_tradnl"/>
           </a:p>
@@ -2294,7 +2299,7 @@
           <a:p>
             <a:fld id="{68557AC5-C7C9-C647-81A0-1565E6FA9BD3}" type="datetimeFigureOut">
               <a:rPr lang="es-ES_tradnl" smtClean="0"/>
-              <a:t>29/3/26</a:t>
+              <a:t>11/4/26</a:t>
             </a:fld>
             <a:endParaRPr lang="es-ES_tradnl"/>
           </a:p>
@@ -2570,7 +2575,7 @@
           <a:p>
             <a:fld id="{68557AC5-C7C9-C647-81A0-1565E6FA9BD3}" type="datetimeFigureOut">
               <a:rPr lang="es-ES_tradnl" smtClean="0"/>
-              <a:t>29/3/26</a:t>
+              <a:t>11/4/26</a:t>
             </a:fld>
             <a:endParaRPr lang="es-ES_tradnl"/>
           </a:p>
@@ -2838,7 +2843,7 @@
           <a:p>
             <a:fld id="{68557AC5-C7C9-C647-81A0-1565E6FA9BD3}" type="datetimeFigureOut">
               <a:rPr lang="es-ES_tradnl" smtClean="0"/>
-              <a:t>29/3/26</a:t>
+              <a:t>11/4/26</a:t>
             </a:fld>
             <a:endParaRPr lang="es-ES_tradnl"/>
           </a:p>
@@ -3253,7 +3258,7 @@
           <a:p>
             <a:fld id="{68557AC5-C7C9-C647-81A0-1565E6FA9BD3}" type="datetimeFigureOut">
               <a:rPr lang="es-ES_tradnl" smtClean="0"/>
-              <a:t>29/3/26</a:t>
+              <a:t>11/4/26</a:t>
             </a:fld>
             <a:endParaRPr lang="es-ES_tradnl"/>
           </a:p>
@@ -3395,7 +3400,7 @@
           <a:p>
             <a:fld id="{68557AC5-C7C9-C647-81A0-1565E6FA9BD3}" type="datetimeFigureOut">
               <a:rPr lang="es-ES_tradnl" smtClean="0"/>
-              <a:t>29/3/26</a:t>
+              <a:t>11/4/26</a:t>
             </a:fld>
             <a:endParaRPr lang="es-ES_tradnl"/>
           </a:p>
@@ -3508,7 +3513,7 @@
           <a:p>
             <a:fld id="{68557AC5-C7C9-C647-81A0-1565E6FA9BD3}" type="datetimeFigureOut">
               <a:rPr lang="es-ES_tradnl" smtClean="0"/>
-              <a:t>29/3/26</a:t>
+              <a:t>11/4/26</a:t>
             </a:fld>
             <a:endParaRPr lang="es-ES_tradnl"/>
           </a:p>
@@ -3821,7 +3826,7 @@
           <a:p>
             <a:fld id="{68557AC5-C7C9-C647-81A0-1565E6FA9BD3}" type="datetimeFigureOut">
               <a:rPr lang="es-ES_tradnl" smtClean="0"/>
-              <a:t>29/3/26</a:t>
+              <a:t>11/4/26</a:t>
             </a:fld>
             <a:endParaRPr lang="es-ES_tradnl"/>
           </a:p>
@@ -4110,7 +4115,7 @@
           <a:p>
             <a:fld id="{68557AC5-C7C9-C647-81A0-1565E6FA9BD3}" type="datetimeFigureOut">
               <a:rPr lang="es-ES_tradnl" smtClean="0"/>
-              <a:t>29/3/26</a:t>
+              <a:t>11/4/26</a:t>
             </a:fld>
             <a:endParaRPr lang="es-ES_tradnl"/>
           </a:p>
@@ -4353,7 +4358,7 @@
           <a:p>
             <a:fld id="{68557AC5-C7C9-C647-81A0-1565E6FA9BD3}" type="datetimeFigureOut">
               <a:rPr lang="es-ES_tradnl" smtClean="0"/>
-              <a:t>29/3/26</a:t>
+              <a:t>11/4/26</a:t>
             </a:fld>
             <a:endParaRPr lang="es-ES_tradnl"/>
           </a:p>
@@ -9696,8 +9701,8 @@
           </a:prstGeom>
         </p:spPr>
       </p:pic>
-      <mc:AlternateContent xmlns:mc="http://schemas.openxmlformats.org/markup-compatibility/2006">
-        <mc:Choice xmlns:a14="http://schemas.microsoft.com/office/drawing/2010/main" Requires="a14">
+      <mc:AlternateContent xmlns:mc="http://schemas.openxmlformats.org/markup-compatibility/2006" xmlns:a14="http://schemas.microsoft.com/office/drawing/2010/main">
+        <mc:Choice Requires="a14">
           <p:graphicFrame>
             <p:nvGraphicFramePr>
               <p:cNvPr id="7" name="Inhaltsplatzhalter 28">
@@ -15204,7 +15209,7 @@
             </a:graphic>
           </p:graphicFrame>
         </mc:Choice>
-        <mc:Fallback>
+        <mc:Fallback xmlns="">
           <p:graphicFrame>
             <p:nvGraphicFramePr>
               <p:cNvPr id="7" name="Inhaltsplatzhalter 28">
@@ -21845,8 +21850,8 @@
           </a:p>
         </p:txBody>
       </p:sp>
-      <mc:AlternateContent xmlns:mc="http://schemas.openxmlformats.org/markup-compatibility/2006">
-        <mc:Choice xmlns:a14="http://schemas.microsoft.com/office/drawing/2010/main" Requires="a14">
+      <mc:AlternateContent xmlns:mc="http://schemas.openxmlformats.org/markup-compatibility/2006" xmlns:a14="http://schemas.microsoft.com/office/drawing/2010/main">
+        <mc:Choice Requires="a14">
           <p:graphicFrame>
             <p:nvGraphicFramePr>
               <p:cNvPr id="2" name="Tabelle 1">
@@ -24933,7 +24938,7 @@
             </a:graphic>
           </p:graphicFrame>
         </mc:Choice>
-        <mc:Fallback>
+        <mc:Fallback xmlns="">
           <p:graphicFrame>
             <p:nvGraphicFramePr>
               <p:cNvPr id="2" name="Tabelle 1">
@@ -28159,8 +28164,8 @@
           <a:chExt cx="0" cy="0"/>
         </a:xfrm>
       </p:grpSpPr>
-      <mc:AlternateContent xmlns:mc="http://schemas.openxmlformats.org/markup-compatibility/2006">
-        <mc:Choice xmlns:a14="http://schemas.microsoft.com/office/drawing/2010/main" Requires="a14">
+      <mc:AlternateContent xmlns:mc="http://schemas.openxmlformats.org/markup-compatibility/2006" xmlns:a14="http://schemas.microsoft.com/office/drawing/2010/main">
+        <mc:Choice Requires="a14">
           <p:sp>
             <p:nvSpPr>
               <p:cNvPr id="2" name="Textplatzhalter 1">
@@ -28219,7 +28224,7 @@
             </p:txBody>
           </p:sp>
         </mc:Choice>
-        <mc:Fallback>
+        <mc:Fallback xmlns="">
           <p:sp>
             <p:nvSpPr>
               <p:cNvPr id="2" name="Textplatzhalter 1">
